--- a/entregas/posts/site/kit/editavel/efeito-rebote-sex-16-10.pptx
+++ b/entregas/posts/site/kit/editavel/efeito-rebote-sex-16-10.pptx
@@ -4143,7 +4143,7 @@
         </p:nvSpPr>
         <p:spPr>
           <a:xfrm>
-            <a:off x="915442" y="4166387"/>
+            <a:off x="915442" y="4105488"/>
             <a:ext cx="4776668" cy="304495"/>
           </a:xfrm>
           <a:prstGeom prst="rect">
@@ -4169,13 +4169,13 @@
               </a:spcAft>
             </a:pPr>
             <a:r>
-              <a:rPr b="0" i="0" sz="2397" lang="pt-BR">
+              <a:rPr b="1" i="0" sz="2397" lang="pt-BR">
                 <a:solidFill>
                   <a:srgbClr val="E9C46A"/>
                 </a:solidFill>
-                <a:latin typeface="Barlow SemiBold"/>
-                <a:ea typeface="Barlow SemiBold"/>
-                <a:cs typeface="Barlow SemiBold"/>
+                <a:latin typeface="Barlow"/>
+                <a:ea typeface="Barlow"/>
+                <a:cs typeface="Barlow"/>
               </a:rPr>
               <a:t>Série Entenda o projeto · parte 3</a:t>
             </a:r>
@@ -4190,7 +4190,7 @@
         </p:nvSpPr>
         <p:spPr>
           <a:xfrm>
-            <a:off x="915442" y="4921833"/>
+            <a:off x="915442" y="4645732"/>
             <a:ext cx="8409742" cy="3689747"/>
           </a:xfrm>
           <a:prstGeom prst="rect">
@@ -4261,7 +4261,7 @@
         </p:nvSpPr>
         <p:spPr>
           <a:xfrm>
-            <a:off x="915442" y="8795275"/>
+            <a:off x="915442" y="8835292"/>
             <a:ext cx="5324109" cy="1040427"/>
           </a:xfrm>
           <a:prstGeom prst="rect">
@@ -4308,7 +4308,7 @@
         </p:nvSpPr>
         <p:spPr>
           <a:xfrm>
-            <a:off x="915442" y="11515488"/>
+            <a:off x="915442" y="11496457"/>
             <a:ext cx="1210717" cy="437712"/>
           </a:xfrm>
           <a:prstGeom prst="rect">
@@ -4638,7 +4638,7 @@
         </p:nvSpPr>
         <p:spPr>
           <a:xfrm>
-            <a:off x="915442" y="1079840"/>
+            <a:off x="915442" y="1018941"/>
             <a:ext cx="2048917" cy="304495"/>
           </a:xfrm>
           <a:prstGeom prst="rect">
@@ -4664,13 +4664,13 @@
               </a:spcAft>
             </a:pPr>
             <a:r>
-              <a:rPr b="0" i="0" sz="2397" lang="pt-BR">
+              <a:rPr b="1" i="0" sz="2397" lang="pt-BR">
                 <a:solidFill>
                   <a:srgbClr val="B5121B"/>
                 </a:solidFill>
-                <a:latin typeface="Barlow SemiBold"/>
-                <a:ea typeface="Barlow SemiBold"/>
-                <a:cs typeface="Barlow SemiBold"/>
+                <a:latin typeface="Barlow"/>
+                <a:ea typeface="Barlow"/>
+                <a:cs typeface="Barlow"/>
               </a:rPr>
               <a:t>O que a lei diz</a:t>
             </a:r>
@@ -4685,7 +4685,7 @@
         </p:nvSpPr>
         <p:spPr>
           <a:xfrm>
-            <a:off x="915442" y="3173880"/>
+            <a:off x="915442" y="2964313"/>
             <a:ext cx="8451979" cy="1867049"/>
           </a:xfrm>
           <a:prstGeom prst="rect">
@@ -4744,7 +4744,7 @@
         </p:nvSpPr>
         <p:spPr>
           <a:xfrm>
-            <a:off x="1353145" y="5670762"/>
+            <a:off x="1353145" y="5742792"/>
             <a:ext cx="7869144" cy="2208908"/>
           </a:xfrm>
           <a:prstGeom prst="rect">
@@ -4802,7 +4802,7 @@
         </p:nvSpPr>
         <p:spPr>
           <a:xfrm>
-            <a:off x="915442" y="8659528"/>
+            <a:off x="915442" y="8731558"/>
             <a:ext cx="8441612" cy="1104454"/>
           </a:xfrm>
           <a:prstGeom prst="rect">
@@ -4849,7 +4849,7 @@
         </p:nvSpPr>
         <p:spPr>
           <a:xfrm>
-            <a:off x="915442" y="11515339"/>
+            <a:off x="915442" y="11496308"/>
             <a:ext cx="2866326" cy="437712"/>
           </a:xfrm>
           <a:prstGeom prst="rect">
@@ -5155,7 +5155,7 @@
         </p:nvSpPr>
         <p:spPr>
           <a:xfrm>
-            <a:off x="915442" y="1079840"/>
+            <a:off x="915442" y="1018941"/>
             <a:ext cx="1684660" cy="304495"/>
           </a:xfrm>
           <a:prstGeom prst="rect">
@@ -5181,13 +5181,13 @@
               </a:spcAft>
             </a:pPr>
             <a:r>
-              <a:rPr b="0" i="0" sz="2397" lang="pt-BR">
+              <a:rPr b="1" i="0" sz="2397" lang="pt-BR">
                 <a:solidFill>
                   <a:srgbClr val="B5121B"/>
                 </a:solidFill>
-                <a:latin typeface="Barlow SemiBold"/>
-                <a:ea typeface="Barlow SemiBold"/>
-                <a:cs typeface="Barlow SemiBold"/>
+                <a:latin typeface="Barlow"/>
+                <a:ea typeface="Barlow"/>
+                <a:cs typeface="Barlow"/>
               </a:rPr>
               <a:t>O Supremo</a:t>
             </a:r>
@@ -5202,7 +5202,7 @@
         </p:nvSpPr>
         <p:spPr>
           <a:xfrm>
-            <a:off x="915442" y="2983231"/>
+            <a:off x="915442" y="2773664"/>
             <a:ext cx="7948077" cy="2800573"/>
           </a:xfrm>
           <a:prstGeom prst="rect">
@@ -5273,7 +5273,7 @@
         </p:nvSpPr>
         <p:spPr>
           <a:xfrm>
-            <a:off x="1353145" y="6413563"/>
+            <a:off x="1353145" y="6485593"/>
             <a:ext cx="7492535" cy="2208908"/>
           </a:xfrm>
           <a:prstGeom prst="rect">
@@ -5342,7 +5342,7 @@
         </p:nvSpPr>
         <p:spPr>
           <a:xfrm>
-            <a:off x="915442" y="9402330"/>
+            <a:off x="915442" y="9474360"/>
             <a:ext cx="6519535" cy="552227"/>
           </a:xfrm>
           <a:prstGeom prst="rect">
@@ -5389,7 +5389,7 @@
         </p:nvSpPr>
         <p:spPr>
           <a:xfrm>
-            <a:off x="915442" y="11515339"/>
+            <a:off x="915442" y="11496308"/>
             <a:ext cx="2276475" cy="437712"/>
           </a:xfrm>
           <a:prstGeom prst="rect">
@@ -5695,7 +5695,7 @@
         </p:nvSpPr>
         <p:spPr>
           <a:xfrm>
-            <a:off x="915442" y="1079840"/>
+            <a:off x="915442" y="1018941"/>
             <a:ext cx="1785015" cy="304495"/>
           </a:xfrm>
           <a:prstGeom prst="rect">
@@ -5721,13 +5721,13 @@
               </a:spcAft>
             </a:pPr>
             <a:r>
-              <a:rPr b="0" i="0" sz="2397" lang="pt-BR">
+              <a:rPr b="1" i="0" sz="2397" lang="pt-BR">
                 <a:solidFill>
                   <a:srgbClr val="B5121B"/>
                 </a:solidFill>
-                <a:latin typeface="Barlow SemiBold"/>
-                <a:ea typeface="Barlow SemiBold"/>
-                <a:cs typeface="Barlow SemiBold"/>
+                <a:latin typeface="Barlow"/>
+                <a:ea typeface="Barlow"/>
+                <a:cs typeface="Barlow"/>
               </a:rPr>
               <a:t>Em Maringá</a:t>
             </a:r>
@@ -5742,7 +5742,7 @@
         </p:nvSpPr>
         <p:spPr>
           <a:xfrm>
-            <a:off x="915442" y="3449956"/>
+            <a:off x="915442" y="3240389"/>
             <a:ext cx="8654162" cy="1867049"/>
           </a:xfrm>
           <a:prstGeom prst="rect">
@@ -5801,7 +5801,7 @@
         </p:nvSpPr>
         <p:spPr>
           <a:xfrm>
-            <a:off x="1353145" y="5946838"/>
+            <a:off x="1353145" y="6018868"/>
             <a:ext cx="7073807" cy="1656681"/>
           </a:xfrm>
           <a:prstGeom prst="rect">
@@ -5859,7 +5859,7 @@
         </p:nvSpPr>
         <p:spPr>
           <a:xfrm>
-            <a:off x="915442" y="8383452"/>
+            <a:off x="915442" y="8455482"/>
             <a:ext cx="8557772" cy="1104454"/>
           </a:xfrm>
           <a:prstGeom prst="rect">
@@ -5906,7 +5906,7 @@
         </p:nvSpPr>
         <p:spPr>
           <a:xfrm>
-            <a:off x="915442" y="11515339"/>
+            <a:off x="915442" y="11496308"/>
             <a:ext cx="4399642" cy="437712"/>
           </a:xfrm>
           <a:prstGeom prst="rect">
@@ -6336,7 +6336,7 @@
         </p:nvSpPr>
         <p:spPr>
           <a:xfrm>
-            <a:off x="915442" y="1079840"/>
+            <a:off x="915442" y="1018941"/>
             <a:ext cx="2818194" cy="304495"/>
           </a:xfrm>
           <a:prstGeom prst="rect">
@@ -6362,13 +6362,13 @@
               </a:spcAft>
             </a:pPr>
             <a:r>
-              <a:rPr b="0" i="0" sz="2397" lang="pt-BR">
+              <a:rPr b="1" i="0" sz="2397" lang="pt-BR">
                 <a:solidFill>
                   <a:srgbClr val="B5121B"/>
                 </a:solidFill>
-                <a:latin typeface="Barlow SemiBold"/>
-                <a:ea typeface="Barlow SemiBold"/>
-                <a:cs typeface="Barlow SemiBold"/>
+                <a:latin typeface="Barlow"/>
+                <a:ea typeface="Barlow"/>
+                <a:cs typeface="Barlow"/>
               </a:rPr>
               <a:t>Quem cobre a falta</a:t>
             </a:r>
@@ -6383,7 +6383,7 @@
         </p:nvSpPr>
         <p:spPr>
           <a:xfrm>
-            <a:off x="915442" y="3231774"/>
+            <a:off x="915442" y="3022207"/>
             <a:ext cx="7353970" cy="1867049"/>
           </a:xfrm>
           <a:prstGeom prst="rect">
@@ -6442,7 +6442,7 @@
         </p:nvSpPr>
         <p:spPr>
           <a:xfrm>
-            <a:off x="1488378" y="5723209"/>
+            <a:off x="1488378" y="5952609"/>
             <a:ext cx="195218" cy="686143"/>
           </a:xfrm>
           <a:prstGeom prst="rect">
@@ -6489,7 +6489,7 @@
         </p:nvSpPr>
         <p:spPr>
           <a:xfrm>
-            <a:off x="2175867" y="5638035"/>
+            <a:off x="2175867" y="5678052"/>
             <a:ext cx="7153058" cy="1040427"/>
           </a:xfrm>
           <a:prstGeom prst="rect">
@@ -6536,7 +6536,7 @@
         </p:nvSpPr>
         <p:spPr>
           <a:xfrm>
-            <a:off x="1456283" y="7365081"/>
+            <a:off x="1456283" y="7594481"/>
             <a:ext cx="259556" cy="686143"/>
           </a:xfrm>
           <a:prstGeom prst="rect">
@@ -6583,7 +6583,7 @@
         </p:nvSpPr>
         <p:spPr>
           <a:xfrm>
-            <a:off x="2175867" y="7539910"/>
+            <a:off x="2175867" y="7579926"/>
             <a:ext cx="6756261" cy="520214"/>
           </a:xfrm>
           <a:prstGeom prst="rect">
@@ -6630,7 +6630,7 @@
         </p:nvSpPr>
         <p:spPr>
           <a:xfrm>
-            <a:off x="1243012" y="8921779"/>
+            <a:off x="1243012" y="8961796"/>
             <a:ext cx="8606686" cy="520214"/>
           </a:xfrm>
           <a:prstGeom prst="rect">
@@ -6677,7 +6677,7 @@
         </p:nvSpPr>
         <p:spPr>
           <a:xfrm>
-            <a:off x="915442" y="11515339"/>
+            <a:off x="915442" y="11496308"/>
             <a:ext cx="1849517" cy="437712"/>
           </a:xfrm>
           <a:prstGeom prst="rect">
@@ -6805,7 +6805,7 @@
         </p:nvSpPr>
         <p:spPr>
           <a:xfrm>
-            <a:off x="3638721" y="5430830"/>
+            <a:off x="3638721" y="5369931"/>
             <a:ext cx="3009409" cy="304495"/>
           </a:xfrm>
           <a:prstGeom prst="rect">
@@ -6831,13 +6831,13 @@
               </a:spcAft>
             </a:pPr>
             <a:r>
-              <a:rPr b="0" i="0" sz="2397" lang="pt-BR">
+              <a:rPr b="1" i="0" sz="2397" lang="pt-BR">
                 <a:solidFill>
                   <a:srgbClr val="E9C46A"/>
                 </a:solidFill>
-                <a:latin typeface="Barlow SemiBold"/>
-                <a:ea typeface="Barlow SemiBold"/>
-                <a:cs typeface="Barlow SemiBold"/>
+                <a:latin typeface="Barlow"/>
+                <a:ea typeface="Barlow"/>
+                <a:cs typeface="Barlow"/>
               </a:rPr>
               <a:t>Na segunda, parte 4</a:t>
             </a:r>
@@ -6852,7 +6852,7 @@
         </p:nvSpPr>
         <p:spPr>
           <a:xfrm>
-            <a:off x="960901" y="6199556"/>
+            <a:off x="960901" y="5989989"/>
             <a:ext cx="8365048" cy="1867049"/>
           </a:xfrm>
           <a:prstGeom prst="rect">
@@ -6911,7 +6911,7 @@
         </p:nvSpPr>
         <p:spPr>
           <a:xfrm>
-            <a:off x="2531872" y="8670860"/>
+            <a:off x="2531872" y="8572105"/>
             <a:ext cx="5223108" cy="493776"/>
           </a:xfrm>
           <a:prstGeom prst="rect">
